--- a/slides/decks/L10-research.pptx
+++ b/slides/decks/L10-research.pptx
@@ -118,13 +118,13 @@
   <p:extLst>
     <p:ext uri="{521415D9-36F7-43E2-AB2F-B90AF26B5E84}">
       <p14:sectionLst xmlns:p14="http://schemas.microsoft.com/office/powerpoint/2010/main">
-        <p14:section name="开场" id="{e747041b-b424-dbbe-75e0-47ae5d5a65dc}">
+        <p14:section name="开场" id="{d8e6b026-e7f6-9e9d-20c3-f16075016d0c}">
           <p14:sldIdLst>
             <p14:sldId id="256"/>
             <p14:sldId id="257"/>
           </p14:sldIdLst>
         </p14:section>
-        <p14:section name="讲解" id="{aced40b3-db13-8c2b-2b82-de50e364fb14}">
+        <p14:section name="讲解" id="{e8592f3b-e6c4-66ac-2fc1-720eb9f0638e}">
           <p14:sldIdLst>
             <p14:sldId id="258"/>
             <p14:sldId id="259"/>
@@ -135,13 +135,13 @@
             <p14:sldId id="264"/>
           </p14:sldIdLst>
         </p14:section>
-        <p14:section name="练习" id="{782fd871-4f88-ec32-8133-ac4dbfe2deb6}">
+        <p14:section name="练习" id="{456eb67c-3210-fd64-a50e-30e23b02b01b}">
           <p14:sldIdLst>
             <p14:sldId id="265"/>
             <p14:sldId id="266"/>
           </p14:sldIdLst>
         </p14:section>
-        <p14:section name="收束" id="{b91a2c3c-4185-0318-327c-257e75bfd1de}">
+        <p14:section name="收束" id="{0b1e2d63-e849-469e-cf42-d7c082afec19}">
           <p14:sldIdLst>
             <p14:sldId id="267"/>
           </p14:sldIdLst>
